--- a/Weekly-Reports/OptimizationSPB.pptx
+++ b/Weekly-Reports/OptimizationSPB.pptx
@@ -219,7 +219,7 @@
           <a:p>
             <a:fld id="{71BACA97-DCC5-D741-8303-D68B06D997A0}" type="datetimeFigureOut">
               <a:rPr lang="sv-SE" smtClean="0"/>
-              <a:t>2026-08-19</a:t>
+              <a:t>2026-09-14</a:t>
             </a:fld>
             <a:endParaRPr lang="sv-SE"/>
           </a:p>
@@ -790,7 +790,7 @@
           <a:p>
             <a:fld id="{369C0258-E083-684F-B81E-2491FB4EFBD1}" type="datetime1">
               <a:rPr lang="sv-SE" smtClean="0"/>
-              <a:t>2026-08-19</a:t>
+              <a:t>2026-09-14</a:t>
             </a:fld>
             <a:endParaRPr lang="sv-SE"/>
           </a:p>
@@ -1132,7 +1132,7 @@
           <a:p>
             <a:fld id="{08C894E9-0885-714C-A367-BDC2DC59BB91}" type="datetime1">
               <a:rPr lang="sv-SE" smtClean="0"/>
-              <a:t>2026-08-19</a:t>
+              <a:t>2026-09-14</a:t>
             </a:fld>
             <a:endParaRPr lang="sv-SE"/>
           </a:p>
@@ -1566,7 +1566,7 @@
           <a:p>
             <a:fld id="{E926FF3D-704F-D246-9E92-4739AF4BF32C}" type="datetime1">
               <a:rPr lang="sv-SE" smtClean="0"/>
-              <a:t>2026-08-19</a:t>
+              <a:t>2026-09-14</a:t>
             </a:fld>
             <a:endParaRPr lang="sv-SE"/>
           </a:p>
@@ -1779,7 +1779,7 @@
           <a:p>
             <a:fld id="{31CF0965-93C0-9548-8879-5851BCBC049F}" type="datetime1">
               <a:rPr lang="sv-SE" smtClean="0"/>
-              <a:t>2026-08-19</a:t>
+              <a:t>2026-09-14</a:t>
             </a:fld>
             <a:endParaRPr lang="sv-SE"/>
           </a:p>
@@ -2025,7 +2025,7 @@
           <a:p>
             <a:fld id="{E2AD36EE-D7EC-624A-BB6C-F8DADCB0E6B6}" type="datetime1">
               <a:rPr lang="sv-SE" smtClean="0"/>
-              <a:t>2026-08-19</a:t>
+              <a:t>2026-09-14</a:t>
             </a:fld>
             <a:endParaRPr lang="sv-SE"/>
           </a:p>
@@ -2266,7 +2266,7 @@
           <a:p>
             <a:fld id="{CEEB1428-F34F-9743-B7C9-0212F6B23615}" type="datetime1">
               <a:rPr lang="sv-SE" smtClean="0"/>
-              <a:t>2026-08-19</a:t>
+              <a:t>2026-09-14</a:t>
             </a:fld>
             <a:endParaRPr lang="sv-SE"/>
           </a:p>
@@ -2520,7 +2520,7 @@
           <a:p>
             <a:fld id="{117AD585-73D1-4C4C-9D7C-030D27625895}" type="datetime1">
               <a:rPr lang="sv-SE" smtClean="0"/>
-              <a:t>2026-08-19</a:t>
+              <a:t>2026-09-14</a:t>
             </a:fld>
             <a:endParaRPr lang="sv-SE"/>
           </a:p>
@@ -2774,7 +2774,7 @@
           <a:p>
             <a:fld id="{07E8514D-D455-9E46-BC18-4265F6A85EC5}" type="datetime1">
               <a:rPr lang="sv-SE" smtClean="0"/>
-              <a:t>2026-08-19</a:t>
+              <a:t>2026-09-14</a:t>
             </a:fld>
             <a:endParaRPr lang="sv-SE"/>
           </a:p>
@@ -3045,7 +3045,7 @@
           <a:p>
             <a:fld id="{A67A58AE-A0B6-FF4E-B30B-64917FEAC316}" type="datetime1">
               <a:rPr lang="sv-SE" smtClean="0"/>
-              <a:t>2026-08-19</a:t>
+              <a:t>2026-09-14</a:t>
             </a:fld>
             <a:endParaRPr lang="sv-SE"/>
           </a:p>
@@ -3472,7 +3472,7 @@
           <a:p>
             <a:fld id="{3626A2DA-BD88-784C-A132-57FFB928491A}" type="datetime1">
               <a:rPr lang="sv-SE" smtClean="0"/>
-              <a:t>2026-08-19</a:t>
+              <a:t>2026-09-14</a:t>
             </a:fld>
             <a:endParaRPr lang="sv-SE"/>
           </a:p>
@@ -3758,7 +3758,7 @@
           <a:p>
             <a:fld id="{AC15C714-122B-4048-9D2D-1F5A3BEA504A}" type="datetime1">
               <a:rPr lang="sv-SE" smtClean="0"/>
-              <a:t>2026-08-19</a:t>
+              <a:t>2026-09-14</a:t>
             </a:fld>
             <a:endParaRPr lang="sv-SE" dirty="0"/>
           </a:p>
@@ -4140,7 +4140,7 @@
           <a:p>
             <a:fld id="{D7F93862-881E-DF46-AD81-FDB1501BAD48}" type="datetime1">
               <a:rPr lang="sv-SE" smtClean="0"/>
-              <a:t>2026-08-19</a:t>
+              <a:t>2026-09-14</a:t>
             </a:fld>
             <a:endParaRPr lang="sv-SE"/>
           </a:p>
@@ -4617,7 +4617,7 @@
           <a:p>
             <a:fld id="{EE5E874D-60F8-8B45-B36B-3029A6FA7FCB}" type="datetime1">
               <a:rPr lang="sv-SE" smtClean="0"/>
-              <a:t>2026-08-19</a:t>
+              <a:t>2026-09-14</a:t>
             </a:fld>
             <a:endParaRPr lang="sv-SE" dirty="0"/>
           </a:p>
@@ -5079,7 +5079,7 @@
           <a:p>
             <a:fld id="{7FE3A002-8AA0-194E-81B1-1ADE5B52840E}" type="datetime1">
               <a:rPr lang="sv-SE" smtClean="0"/>
-              <a:t>2026-08-19</a:t>
+              <a:t>2026-09-14</a:t>
             </a:fld>
             <a:endParaRPr lang="sv-SE" dirty="0"/>
           </a:p>
@@ -5592,7 +5592,7 @@
           <a:p>
             <a:fld id="{B003E109-5503-A446-83DE-4F0349794E27}" type="datetime1">
               <a:rPr lang="sv-SE" smtClean="0"/>
-              <a:t>2026-08-19</a:t>
+              <a:t>2026-09-14</a:t>
             </a:fld>
             <a:endParaRPr lang="sv-SE" dirty="0"/>
           </a:p>
@@ -6090,7 +6090,7 @@
           <a:p>
             <a:fld id="{1F9706F9-3770-3C47-9C0E-E405B1F87DBD}" type="datetime1">
               <a:rPr lang="sv-SE" smtClean="0"/>
-              <a:t>2026-08-19</a:t>
+              <a:t>2026-09-14</a:t>
             </a:fld>
             <a:endParaRPr lang="sv-SE" dirty="0"/>
           </a:p>
@@ -6552,7 +6552,7 @@
           <a:p>
             <a:fld id="{8E503FC7-D8F6-4243-8CCB-9A739180F56A}" type="datetime1">
               <a:rPr lang="sv-SE" smtClean="0"/>
-              <a:t>2026-08-19</a:t>
+              <a:t>2026-09-14</a:t>
             </a:fld>
             <a:endParaRPr lang="sv-SE" dirty="0"/>
           </a:p>
@@ -7014,7 +7014,7 @@
           <a:p>
             <a:fld id="{9719EDF7-C24A-7E4C-9EBB-98C778ECC35A}" type="datetime1">
               <a:rPr lang="sv-SE" smtClean="0"/>
-              <a:t>2026-08-19</a:t>
+              <a:t>2026-09-14</a:t>
             </a:fld>
             <a:endParaRPr lang="sv-SE" dirty="0"/>
           </a:p>
@@ -7476,7 +7476,7 @@
           <a:p>
             <a:fld id="{6DB96772-CADE-B345-804B-3DF93A11AE0A}" type="datetime1">
               <a:rPr lang="sv-SE" smtClean="0"/>
-              <a:t>2026-08-19</a:t>
+              <a:t>2026-09-14</a:t>
             </a:fld>
             <a:endParaRPr lang="sv-SE" dirty="0"/>
           </a:p>
@@ -7938,7 +7938,7 @@
           <a:p>
             <a:fld id="{669F8B43-28B6-0949-93DC-6B291391CFD4}" type="datetime1">
               <a:rPr lang="sv-SE" smtClean="0"/>
-              <a:t>2026-08-19</a:t>
+              <a:t>2026-09-14</a:t>
             </a:fld>
             <a:endParaRPr lang="sv-SE" dirty="0"/>
           </a:p>
@@ -8158,7 +8158,7 @@
           <a:p>
             <a:fld id="{3450A6BD-1EFB-BD42-9DC0-F0A6BEB4C27D}" type="datetime1">
               <a:rPr lang="sv-SE" smtClean="0"/>
-              <a:t>2026-08-19</a:t>
+              <a:t>2026-09-14</a:t>
             </a:fld>
             <a:endParaRPr lang="sv-SE"/>
           </a:p>
@@ -8449,7 +8449,7 @@
           <a:p>
             <a:fld id="{ADBDFCF2-2839-8D4F-B5E5-9B488CE2E4EE}" type="datetime1">
               <a:rPr lang="sv-SE" smtClean="0"/>
-              <a:t>2026-08-19</a:t>
+              <a:t>2026-09-14</a:t>
             </a:fld>
             <a:endParaRPr lang="sv-SE"/>
           </a:p>
@@ -8813,7 +8813,7 @@
           <a:p>
             <a:fld id="{A1A0D637-CC39-0F47-97F1-76AAE59A5700}" type="datetime1">
               <a:rPr lang="sv-SE" smtClean="0"/>
-              <a:t>2026-08-19</a:t>
+              <a:t>2026-09-14</a:t>
             </a:fld>
             <a:endParaRPr lang="sv-SE"/>
           </a:p>
@@ -9401,7 +9401,7 @@
           <a:p>
             <a:fld id="{47A9746E-62D8-944D-99B0-D98695592DCF}" type="datetime1">
               <a:rPr lang="sv-SE" smtClean="0"/>
-              <a:t>2026-08-19</a:t>
+              <a:t>2026-09-14</a:t>
             </a:fld>
             <a:endParaRPr lang="sv-SE"/>
           </a:p>
@@ -9765,7 +9765,7 @@
           <a:p>
             <a:fld id="{EC42A3C6-0141-7544-8502-44E44E5AD51F}" type="datetime1">
               <a:rPr lang="sv-SE" smtClean="0"/>
-              <a:t>2026-08-19</a:t>
+              <a:t>2026-09-14</a:t>
             </a:fld>
             <a:endParaRPr lang="sv-SE"/>
           </a:p>
@@ -10381,7 +10381,7 @@
           <a:p>
             <a:fld id="{5A8E03F6-2D99-9C4F-8DF5-D169CFDD1A0C}" type="datetime1">
               <a:rPr lang="sv-SE" smtClean="0"/>
-              <a:t>2026-08-19</a:t>
+              <a:t>2026-09-14</a:t>
             </a:fld>
             <a:endParaRPr lang="sv-SE"/>
           </a:p>
@@ -10818,7 +10818,7 @@
           <a:p>
             <a:fld id="{8AF63115-71BE-3E46-BB5A-A4600F1506C7}" type="datetime1">
               <a:rPr lang="sv-SE" smtClean="0"/>
-              <a:t>2026-08-19</a:t>
+              <a:t>2026-09-14</a:t>
             </a:fld>
             <a:endParaRPr lang="sv-SE"/>
           </a:p>
@@ -11591,7 +11591,7 @@
           <a:p>
             <a:fld id="{309FED66-59CE-6445-BA05-B37954B8CE47}" type="datetime1">
               <a:rPr lang="sv-SE" smtClean="0"/>
-              <a:t>2026-08-19</a:t>
+              <a:t>2026-09-14</a:t>
             </a:fld>
             <a:endParaRPr lang="sv-SE"/>
           </a:p>
@@ -11736,7 +11736,7 @@
           <a:p>
             <a:fld id="{8C332B6B-9A86-944B-B689-8453757791DF}" type="datetime1">
               <a:rPr lang="sv-SE" smtClean="0"/>
-              <a:t>2026-08-19</a:t>
+              <a:t>2026-09-14</a:t>
             </a:fld>
             <a:endParaRPr lang="sv-SE" dirty="0"/>
           </a:p>
@@ -11883,7 +11883,7 @@
           <a:p>
             <a:fld id="{1957E16A-1246-F744-BDA8-D5896FB385F8}" type="datetime1">
               <a:rPr lang="sv-SE" smtClean="0"/>
-              <a:t>2026-08-19</a:t>
+              <a:t>2026-09-14</a:t>
             </a:fld>
             <a:endParaRPr lang="sv-SE" dirty="0"/>
           </a:p>
@@ -12068,7 +12068,7 @@
           <a:p>
             <a:fld id="{68888E78-A3E8-2E47-A37C-B0DACC4AC38C}" type="datetime1">
               <a:rPr lang="sv-SE" smtClean="0"/>
-              <a:t>2026-08-19</a:t>
+              <a:t>2026-09-14</a:t>
             </a:fld>
             <a:endParaRPr lang="sv-SE" dirty="0"/>
           </a:p>
@@ -12261,7 +12261,7 @@
           <a:p>
             <a:fld id="{AC1801B8-2ABD-E645-B0F3-2F4D3FFFF5AE}" type="datetime1">
               <a:rPr lang="sv-SE" smtClean="0"/>
-              <a:t>2026-08-19</a:t>
+              <a:t>2026-09-14</a:t>
             </a:fld>
             <a:endParaRPr lang="sv-SE" dirty="0"/>
           </a:p>
@@ -12454,7 +12454,7 @@
           <a:p>
             <a:fld id="{164FA935-6078-184F-946C-D8B2130A7BC4}" type="datetime1">
               <a:rPr lang="sv-SE" smtClean="0"/>
-              <a:t>2026-08-19</a:t>
+              <a:t>2026-09-14</a:t>
             </a:fld>
             <a:endParaRPr lang="sv-SE" dirty="0"/>
           </a:p>
@@ -12815,7 +12815,7 @@
           <a:p>
             <a:fld id="{FC84D86F-77A2-B649-9DAB-4D28280CD96F}" type="datetime1">
               <a:rPr lang="sv-SE" smtClean="0"/>
-              <a:t>2026-08-19</a:t>
+              <a:t>2026-09-14</a:t>
             </a:fld>
             <a:endParaRPr lang="sv-SE"/>
           </a:p>
@@ -12931,7 +12931,7 @@
           <a:p>
             <a:fld id="{878DDE6C-6786-8C48-9317-AF0776715ACF}" type="datetime1">
               <a:rPr lang="sv-SE" smtClean="0"/>
-              <a:t>2026-08-19</a:t>
+              <a:t>2026-09-14</a:t>
             </a:fld>
             <a:endParaRPr lang="sv-SE"/>
           </a:p>
@@ -13148,7 +13148,7 @@
           <a:p>
             <a:fld id="{31CF0965-93C0-9548-8879-5851BCBC049F}" type="datetime1">
               <a:rPr lang="sv-SE" smtClean="0"/>
-              <a:t>2026-08-19</a:t>
+              <a:t>2026-09-14</a:t>
             </a:fld>
             <a:endParaRPr lang="sv-SE"/>
           </a:p>
@@ -13302,7 +13302,7 @@
           <a:p>
             <a:fld id="{31CF0965-93C0-9548-8879-5851BCBC049F}" type="datetime1">
               <a:rPr lang="sv-SE" smtClean="0"/>
-              <a:t>2026-08-19</a:t>
+              <a:t>2026-09-14</a:t>
             </a:fld>
             <a:endParaRPr lang="sv-SE"/>
           </a:p>
@@ -13470,7 +13470,7 @@
           <a:p>
             <a:fld id="{3A3328FD-6257-AC43-9CE4-2903A4D2BB9D}" type="datetime1">
               <a:rPr lang="sv-SE" smtClean="0"/>
-              <a:t>2026-08-19</a:t>
+              <a:t>2026-09-14</a:t>
             </a:fld>
             <a:endParaRPr lang="sv-SE" dirty="0"/>
           </a:p>
@@ -13732,7 +13732,7 @@
           <a:p>
             <a:fld id="{32BABC24-2A82-014C-9256-A51302708EE4}" type="datetime1">
               <a:rPr lang="sv-SE" smtClean="0"/>
-              <a:t>2026-08-19</a:t>
+              <a:t>2026-09-14</a:t>
             </a:fld>
             <a:endParaRPr lang="sv-SE" dirty="0"/>
           </a:p>
@@ -14037,7 +14037,7 @@
           <a:p>
             <a:fld id="{77AA192B-9140-F746-B429-ACF197DC5439}" type="datetime1">
               <a:rPr lang="sv-SE" smtClean="0"/>
-              <a:t>2026-08-19</a:t>
+              <a:t>2026-09-14</a:t>
             </a:fld>
             <a:endParaRPr lang="sv-SE" dirty="0"/>
           </a:p>
@@ -20252,7 +20252,7 @@
           <a:p>
             <a:fld id="{120FD48D-1F42-B341-AF85-AE480DB64991}" type="datetime1">
               <a:rPr lang="sv-SE" smtClean="0"/>
-              <a:t>2026-08-19</a:t>
+              <a:t>2026-09-14</a:t>
             </a:fld>
             <a:endParaRPr lang="sv-SE" dirty="0"/>
           </a:p>
@@ -20812,7 +20812,7 @@
           <a:p>
             <a:fld id="{45830D3C-297D-AF4B-BF84-42155CB091D6}" type="datetime1">
               <a:rPr lang="sv-SE" smtClean="0"/>
-              <a:t>2026-08-19</a:t>
+              <a:t>2026-09-14</a:t>
             </a:fld>
             <a:endParaRPr lang="sv-SE" dirty="0"/>
           </a:p>
@@ -21586,7 +21586,7 @@
           <a:p>
             <a:fld id="{275DBF22-A5DA-3B43-92C3-F6BCD51A4216}" type="datetime1">
               <a:rPr lang="sv-SE" smtClean="0"/>
-              <a:t>2026-08-19</a:t>
+              <a:t>2026-09-14</a:t>
             </a:fld>
             <a:endParaRPr lang="sv-SE"/>
           </a:p>
@@ -21907,7 +21907,7 @@
           <a:p>
             <a:fld id="{230F5ACA-7455-4642-BFE0-35A3360E2D3F}" type="datetime1">
               <a:rPr lang="sv-SE" smtClean="0"/>
-              <a:t>2026-08-19</a:t>
+              <a:t>2026-09-14</a:t>
             </a:fld>
             <a:endParaRPr lang="sv-SE"/>
           </a:p>
@@ -22294,7 +22294,7 @@
           <a:p>
             <a:fld id="{237029E1-9B44-DE43-98B9-EBAFD8B9E3F1}" type="datetime1">
               <a:rPr lang="sv-SE" smtClean="0"/>
-              <a:t>2026-08-19</a:t>
+              <a:t>2026-09-14</a:t>
             </a:fld>
             <a:endParaRPr lang="sv-SE"/>
           </a:p>
@@ -22637,7 +22637,7 @@
           <a:p>
             <a:fld id="{EECCBBAF-5C49-D145-9814-61A8103632A9}" type="datetime1">
               <a:rPr lang="sv-SE" smtClean="0"/>
-              <a:t>2026-08-19</a:t>
+              <a:t>2026-09-14</a:t>
             </a:fld>
             <a:endParaRPr lang="sv-SE"/>
           </a:p>
@@ -23066,7 +23066,7 @@
           <a:p>
             <a:fld id="{823D8581-A4D9-BE4A-AEA5-9282CF05EB42}" type="datetime1">
               <a:rPr lang="sv-SE" smtClean="0"/>
-              <a:t>2026-08-19</a:t>
+              <a:t>2026-09-14</a:t>
             </a:fld>
             <a:endParaRPr lang="sv-SE"/>
           </a:p>
@@ -23326,7 +23326,7 @@
           <a:p>
             <a:fld id="{888E4D63-BE2C-4D4B-BBD2-256262659A9F}" type="datetime1">
               <a:rPr lang="sv-SE" smtClean="0"/>
-              <a:t>2026-08-19</a:t>
+              <a:t>2026-09-14</a:t>
             </a:fld>
             <a:endParaRPr lang="sv-SE" dirty="0"/>
           </a:p>
@@ -25157,8 +25157,8 @@
           </a:p>
         </p:txBody>
       </p:sp>
-      <mc:AlternateContent xmlns:mc="http://schemas.openxmlformats.org/markup-compatibility/2006">
-        <mc:Choice xmlns:a14="http://schemas.microsoft.com/office/drawing/2010/main" Requires="a14">
+      <mc:AlternateContent xmlns:mc="http://schemas.openxmlformats.org/markup-compatibility/2006" xmlns:a14="http://schemas.microsoft.com/office/drawing/2010/main">
+        <mc:Choice Requires="a14">
           <p:sp>
             <p:nvSpPr>
               <p:cNvPr id="35" name="Shape 2">
@@ -25324,7 +25324,7 @@
             </p:txBody>
           </p:sp>
         </mc:Choice>
-        <mc:Fallback>
+        <mc:Fallback xmlns="">
           <p:sp>
             <p:nvSpPr>
               <p:cNvPr id="35" name="Shape 2">
@@ -26262,8 +26262,8 @@
           </a:p>
         </p:txBody>
       </p:sp>
-      <mc:AlternateContent xmlns:mc="http://schemas.openxmlformats.org/markup-compatibility/2006">
-        <mc:Choice xmlns:a14="http://schemas.microsoft.com/office/drawing/2010/main" Requires="a14">
+      <mc:AlternateContent xmlns:mc="http://schemas.openxmlformats.org/markup-compatibility/2006" xmlns:a14="http://schemas.microsoft.com/office/drawing/2010/main">
+        <mc:Choice Requires="a14">
           <p:sp>
             <p:nvSpPr>
               <p:cNvPr id="39" name="Shape 15">
@@ -26429,11 +26429,12 @@
                     </m:oMath>
                   </m:oMathPara>
                 </a14:m>
+                <a:endParaRPr/>
               </a:p>
             </p:txBody>
           </p:sp>
         </mc:Choice>
-        <mc:Fallback>
+        <mc:Fallback xmlns="">
           <p:sp>
             <p:nvSpPr>
               <p:cNvPr id="39" name="Shape 15">
@@ -26657,8 +26658,8 @@
           </a:p>
         </p:txBody>
       </p:sp>
-      <mc:AlternateContent xmlns:mc="http://schemas.openxmlformats.org/markup-compatibility/2006">
-        <mc:Choice xmlns:a14="http://schemas.microsoft.com/office/drawing/2010/main" Requires="a14">
+      <mc:AlternateContent xmlns:mc="http://schemas.openxmlformats.org/markup-compatibility/2006" xmlns:a14="http://schemas.microsoft.com/office/drawing/2010/main">
+        <mc:Choice Requires="a14">
           <p:sp>
             <p:nvSpPr>
               <p:cNvPr id="20" name="Shape 2">
@@ -26708,6 +26709,7 @@
                 <a:endParaRPr lang="en-US" dirty="0"/>
               </a:p>
               <a:p>
+                <a:pPr/>
                 <a14:m>
                   <m:oMathPara xmlns:m="http://schemas.openxmlformats.org/officeDocument/2006/math">
                     <m:oMath>
@@ -26780,7 +26782,7 @@
                           <m:f>
                             <m:fPr>
                               <m:ctrlPr>
-                                <a:rPr lang="en-US" sz="1200" b="0" i="1" dirty="0" smtClean="0">
+                                <a:rPr lang="en-US" sz="1200" i="1" dirty="0" err="1">
                                   <a:solidFill>
                                     <a:srgbClr val="475569"/>
                                   </a:solidFill>
@@ -26850,11 +26852,12 @@
                     </m:oMath>
                   </m:oMathPara>
                 </a14:m>
+                <a:endParaRPr lang="en-US" dirty="0"/>
               </a:p>
             </p:txBody>
           </p:sp>
         </mc:Choice>
-        <mc:Fallback>
+        <mc:Fallback xmlns="">
           <p:sp>
             <p:nvSpPr>
               <p:cNvPr id="20" name="Shape 2">
@@ -26907,8 +26910,8 @@
           </p:sp>
         </mc:Fallback>
       </mc:AlternateContent>
-      <mc:AlternateContent xmlns:mc="http://schemas.openxmlformats.org/markup-compatibility/2006">
-        <mc:Choice xmlns:a14="http://schemas.microsoft.com/office/drawing/2010/main" Requires="a14">
+      <mc:AlternateContent xmlns:mc="http://schemas.openxmlformats.org/markup-compatibility/2006" xmlns:a14="http://schemas.microsoft.com/office/drawing/2010/main">
+        <mc:Choice Requires="a14">
           <p:sp>
             <p:nvSpPr>
               <p:cNvPr id="23" name="Shape 2">
@@ -26958,6 +26961,7 @@
                 <a:endParaRPr lang="en-US" dirty="0"/>
               </a:p>
               <a:p>
+                <a:pPr/>
                 <a14:m>
                   <m:oMathPara xmlns:m="http://schemas.openxmlformats.org/officeDocument/2006/math">
                     <m:oMath>
@@ -27136,11 +27140,12 @@
                     </m:oMath>
                   </m:oMathPara>
                 </a14:m>
+                <a:endParaRPr lang="en-US" dirty="0"/>
               </a:p>
             </p:txBody>
           </p:sp>
         </mc:Choice>
-        <mc:Fallback>
+        <mc:Fallback xmlns="">
           <p:sp>
             <p:nvSpPr>
               <p:cNvPr id="23" name="Shape 2">
@@ -27193,8 +27198,8 @@
           </p:sp>
         </mc:Fallback>
       </mc:AlternateContent>
-      <mc:AlternateContent xmlns:mc="http://schemas.openxmlformats.org/markup-compatibility/2006">
-        <mc:Choice xmlns:a14="http://schemas.microsoft.com/office/drawing/2010/main" Requires="a14">
+      <mc:AlternateContent xmlns:mc="http://schemas.openxmlformats.org/markup-compatibility/2006" xmlns:a14="http://schemas.microsoft.com/office/drawing/2010/main">
+        <mc:Choice Requires="a14">
           <p:sp>
             <p:nvSpPr>
               <p:cNvPr id="25" name="Shape 15">
@@ -27231,6 +27236,7 @@
               <a:bodyPr/>
               <a:lstStyle/>
               <a:p>
+                <a:pPr/>
                 <a14:m>
                   <m:oMathPara xmlns:m="http://schemas.openxmlformats.org/officeDocument/2006/math">
                     <m:oMath>
@@ -27419,7 +27425,7 @@
                       <m:f>
                         <m:fPr>
                           <m:ctrlPr>
-                            <a:rPr lang="en-US" sz="1600" b="0" i="0" dirty="0" smtClean="0">
+                            <a:rPr lang="en-US" sz="1600" i="1" dirty="0">
                               <a:solidFill>
                                 <a:srgbClr val="0F172A"/>
                               </a:solidFill>
@@ -27527,7 +27533,7 @@
                       <m:f>
                         <m:fPr>
                           <m:ctrlPr>
-                            <a:rPr lang="en-US" sz="1600" b="0" i="0" dirty="0" smtClean="0">
+                            <a:rPr lang="en-US" sz="1600" i="1" dirty="0">
                               <a:solidFill>
                                 <a:srgbClr val="0F172A"/>
                               </a:solidFill>
@@ -27641,11 +27647,12 @@
                     </m:oMath>
                   </m:oMathPara>
                 </a14:m>
+                <a:endParaRPr/>
               </a:p>
             </p:txBody>
           </p:sp>
         </mc:Choice>
-        <mc:Fallback>
+        <mc:Fallback xmlns="">
           <p:sp>
             <p:nvSpPr>
               <p:cNvPr id="25" name="Shape 15">
@@ -27698,8 +27705,8 @@
           </p:sp>
         </mc:Fallback>
       </mc:AlternateContent>
-      <mc:AlternateContent xmlns:mc="http://schemas.openxmlformats.org/markup-compatibility/2006">
-        <mc:Choice xmlns:a14="http://schemas.microsoft.com/office/drawing/2010/main" Requires="a14">
+      <mc:AlternateContent xmlns:mc="http://schemas.openxmlformats.org/markup-compatibility/2006" xmlns:a14="http://schemas.microsoft.com/office/drawing/2010/main">
+        <mc:Choice Requires="a14">
           <p:sp>
             <p:nvSpPr>
               <p:cNvPr id="27" name="Shape 15">
@@ -27736,6 +27743,7 @@
               <a:bodyPr/>
               <a:lstStyle/>
               <a:p>
+                <a:pPr/>
                 <a14:m>
                   <m:oMathPara xmlns:m="http://schemas.openxmlformats.org/officeDocument/2006/math">
                     <m:oMath>
@@ -27951,11 +27959,12 @@
                     </m:oMath>
                   </m:oMathPara>
                 </a14:m>
+                <a:endParaRPr/>
               </a:p>
             </p:txBody>
           </p:sp>
         </mc:Choice>
-        <mc:Fallback>
+        <mc:Fallback xmlns="">
           <p:sp>
             <p:nvSpPr>
               <p:cNvPr id="27" name="Shape 15">
@@ -29612,8 +29621,8 @@
           </a:p>
         </p:txBody>
       </p:sp>
-      <mc:AlternateContent xmlns:mc="http://schemas.openxmlformats.org/markup-compatibility/2006">
-        <mc:Choice xmlns:a14="http://schemas.microsoft.com/office/drawing/2010/main" Requires="a14">
+      <mc:AlternateContent xmlns:mc="http://schemas.openxmlformats.org/markup-compatibility/2006" xmlns:a14="http://schemas.microsoft.com/office/drawing/2010/main">
+        <mc:Choice Requires="a14">
           <p:sp>
             <p:nvSpPr>
               <p:cNvPr id="21" name="Shape 15">
@@ -29854,6 +29863,7 @@
                     </m:oMath>
                   </m:oMathPara>
                 </a14:m>
+                <a:endParaRPr/>
               </a:p>
               <a:p>
                 <a:pPr algn="ctr"/>
@@ -29862,7 +29872,7 @@
             </p:txBody>
           </p:sp>
         </mc:Choice>
-        <mc:Fallback>
+        <mc:Fallback xmlns="">
           <p:sp>
             <p:nvSpPr>
               <p:cNvPr id="21" name="Shape 15">
@@ -30810,8 +30820,8 @@
           </a:p>
         </p:txBody>
       </p:sp>
-      <mc:AlternateContent xmlns:mc="http://schemas.openxmlformats.org/markup-compatibility/2006">
-        <mc:Choice xmlns:a14="http://schemas.microsoft.com/office/drawing/2010/main" Requires="a14">
+      <mc:AlternateContent xmlns:mc="http://schemas.openxmlformats.org/markup-compatibility/2006" xmlns:a14="http://schemas.microsoft.com/office/drawing/2010/main">
+        <mc:Choice Requires="a14">
           <p:sp>
             <p:nvSpPr>
               <p:cNvPr id="7" name="Shape 15">
@@ -31264,7 +31274,7 @@
             </p:txBody>
           </p:sp>
         </mc:Choice>
-        <mc:Fallback>
+        <mc:Fallback xmlns="">
           <p:sp>
             <p:nvSpPr>
               <p:cNvPr id="7" name="Shape 15">
@@ -31317,8 +31327,8 @@
           </p:sp>
         </mc:Fallback>
       </mc:AlternateContent>
-      <mc:AlternateContent xmlns:mc="http://schemas.openxmlformats.org/markup-compatibility/2006">
-        <mc:Choice xmlns:a14="http://schemas.microsoft.com/office/drawing/2010/main" Requires="a14">
+      <mc:AlternateContent xmlns:mc="http://schemas.openxmlformats.org/markup-compatibility/2006" xmlns:a14="http://schemas.microsoft.com/office/drawing/2010/main">
+        <mc:Choice Requires="a14">
           <p:sp>
             <p:nvSpPr>
               <p:cNvPr id="10" name="Shape 15">
@@ -31576,7 +31586,7 @@
             </p:txBody>
           </p:sp>
         </mc:Choice>
-        <mc:Fallback>
+        <mc:Fallback xmlns="">
           <p:sp>
             <p:nvSpPr>
               <p:cNvPr id="10" name="Shape 15">
@@ -31629,8 +31639,8 @@
           </p:sp>
         </mc:Fallback>
       </mc:AlternateContent>
-      <mc:AlternateContent xmlns:mc="http://schemas.openxmlformats.org/markup-compatibility/2006">
-        <mc:Choice xmlns:a14="http://schemas.microsoft.com/office/drawing/2010/main" Requires="a14">
+      <mc:AlternateContent xmlns:mc="http://schemas.openxmlformats.org/markup-compatibility/2006" xmlns:a14="http://schemas.microsoft.com/office/drawing/2010/main">
+        <mc:Choice Requires="a14">
           <p:sp>
             <p:nvSpPr>
               <p:cNvPr id="13" name="Shape 15">
@@ -31667,6 +31677,7 @@
               <a:bodyPr/>
               <a:lstStyle/>
               <a:p>
+                <a:pPr/>
                 <a14:m>
                   <m:oMathPara xmlns:m="http://schemas.openxmlformats.org/officeDocument/2006/math">
                     <m:oMath>
@@ -31861,7 +31872,7 @@
                       <m:f>
                         <m:fPr>
                           <m:ctrlPr>
-                            <a:rPr lang="en-US" sz="1600" b="0" i="0" dirty="0" smtClean="0">
+                            <a:rPr lang="en-US" sz="1600" i="1" dirty="0">
                               <a:solidFill>
                                 <a:srgbClr val="0F172A"/>
                               </a:solidFill>
@@ -32015,11 +32026,12 @@
                     </m:oMath>
                   </m:oMathPara>
                 </a14:m>
+                <a:endParaRPr/>
               </a:p>
             </p:txBody>
           </p:sp>
         </mc:Choice>
-        <mc:Fallback>
+        <mc:Fallback xmlns="">
           <p:sp>
             <p:nvSpPr>
               <p:cNvPr id="13" name="Shape 15">
@@ -32072,8 +32084,8 @@
           </p:sp>
         </mc:Fallback>
       </mc:AlternateContent>
-      <mc:AlternateContent xmlns:mc="http://schemas.openxmlformats.org/markup-compatibility/2006">
-        <mc:Choice xmlns:a14="http://schemas.microsoft.com/office/drawing/2010/main" Requires="a14">
+      <mc:AlternateContent xmlns:mc="http://schemas.openxmlformats.org/markup-compatibility/2006" xmlns:a14="http://schemas.microsoft.com/office/drawing/2010/main">
+        <mc:Choice Requires="a14">
           <p:sp>
             <p:nvSpPr>
               <p:cNvPr id="16" name="Shape 15">
@@ -32116,6 +32128,7 @@
               <a:bodyPr/>
               <a:lstStyle/>
               <a:p>
+                <a:pPr/>
                 <a14:m>
                   <m:oMathPara xmlns:m="http://schemas.openxmlformats.org/officeDocument/2006/math">
                     <m:oMath>
@@ -32386,11 +32399,12 @@
                     </m:oMath>
                   </m:oMathPara>
                 </a14:m>
+                <a:endParaRPr/>
               </a:p>
             </p:txBody>
           </p:sp>
         </mc:Choice>
-        <mc:Fallback>
+        <mc:Fallback xmlns="">
           <p:sp>
             <p:nvSpPr>
               <p:cNvPr id="16" name="Shape 15">
